--- a/system-design-101/vi/lessons/sd-01-023/slides/sd-01-023.pptx
+++ b/system-design-101/vi/lessons/sd-01-023/slides/sd-01-023.pptx
@@ -3806,7 +3806,7 @@
               <a:t> mở</a:t>
             </a:r>
             <a:r>
-              <a:rPr lang="en-US" sz="7200" dirty="0" spc="-58" kern="0">
+              <a:rPr lang="en-US" sz="7200" dirty="0" spc="-37" kern="0">
                 <a:solidFill>
                   <a:srgbClr val="14161C"/>
                 </a:solidFill>
@@ -3814,7 +3814,7 @@
                 <a:ea typeface="Bricolage Grotesque ExtraBold" pitchFamily="34" charset="-122"/>
                 <a:cs typeface="Bricolage Grotesque ExtraBold" pitchFamily="34" charset="-120"/>
               </a:rPr>
-              <a:t> cửa</a:t>
+              <a:t> cửa;</a:t>
             </a:r>
             <a:r>
               <a:rPr lang="en-US" sz="7200" dirty="0" spc="-1" kern="0">
@@ -3825,10 +3825,10 @@
                 <a:ea typeface="Bricolage Grotesque ExtraBold" pitchFamily="34" charset="-122"/>
                 <a:cs typeface="Bricolage Grotesque ExtraBold" pitchFamily="34" charset="-120"/>
               </a:rPr>
-              <a:t> cho</a:t>
-            </a:r>
-            <a:r>
-              <a:rPr lang="en-US" sz="7200" dirty="0" spc="13" kern="0">
+              <a:t> dịch</a:t>
+            </a:r>
+            <a:r>
+              <a:rPr lang="en-US" sz="7200" dirty="0" spc="1" kern="0">
                 <a:solidFill>
                   <a:srgbClr val="14161C"/>
                 </a:solidFill>
@@ -3836,10 +3836,10 @@
                 <a:ea typeface="Bricolage Grotesque ExtraBold" pitchFamily="34" charset="-122"/>
                 <a:cs typeface="Bricolage Grotesque ExtraBold" pitchFamily="34" charset="-120"/>
               </a:rPr>
-              <a:t> đối</a:t>
-            </a:r>
-            <a:r>
-              <a:rPr lang="en-US" sz="7200" dirty="0" spc="-5" kern="0">
+              <a:t> vụ</a:t>
+            </a:r>
+            <a:r>
+              <a:rPr lang="en-US" sz="7200" dirty="0" spc="-32" kern="0">
                 <a:solidFill>
                   <a:srgbClr val="14161C"/>
                 </a:solidFill>
@@ -3847,10 +3847,10 @@
                 <a:ea typeface="Bricolage Grotesque ExtraBold" pitchFamily="34" charset="-122"/>
                 <a:cs typeface="Bricolage Grotesque ExtraBold" pitchFamily="34" charset="-120"/>
               </a:rPr>
-              <a:t> tác.</a:t>
-            </a:r>
-            <a:r>
-              <a:rPr lang="en-US" sz="7200" dirty="0" spc="2" kern="0">
+              <a:t> đơn</a:t>
+            </a:r>
+            <a:r>
+              <a:rPr lang="en-US" sz="7200" dirty="0" spc="-1" kern="0">
                 <a:solidFill>
                   <a:srgbClr val="14161C"/>
                 </a:solidFill>
@@ -3858,43 +3858,10 @@
                 <a:ea typeface="Bricolage Grotesque ExtraBold" pitchFamily="34" charset="-122"/>
                 <a:cs typeface="Bricolage Grotesque ExtraBold" pitchFamily="34" charset="-120"/>
               </a:rPr>
-              <a:t> Dịch</a:t>
-            </a:r>
-            <a:r>
-              <a:rPr lang="en-US" sz="7200" dirty="0" spc="0" kern="0">
-                <a:solidFill>
-                  <a:srgbClr val="14161C"/>
-                </a:solidFill>
-                <a:latin typeface="Bricolage Grotesque ExtraBold" pitchFamily="34" charset="0"/>
-                <a:ea typeface="Bricolage Grotesque ExtraBold" pitchFamily="34" charset="-122"/>
-                <a:cs typeface="Bricolage Grotesque ExtraBold" pitchFamily="34" charset="-120"/>
-              </a:rPr>
-              <a:t> vụ</a:t>
-            </a:r>
-            <a:r>
-              <a:rPr lang="en-US" sz="7200" dirty="0" spc="-32" kern="0">
-                <a:solidFill>
-                  <a:srgbClr val="14161C"/>
-                </a:solidFill>
-                <a:latin typeface="Bricolage Grotesque ExtraBold" pitchFamily="34" charset="0"/>
-                <a:ea typeface="Bricolage Grotesque ExtraBold" pitchFamily="34" charset="-122"/>
-                <a:cs typeface="Bricolage Grotesque ExtraBold" pitchFamily="34" charset="-120"/>
-              </a:rPr>
-              <a:t> đơn</a:t>
-            </a:r>
-            <a:r>
-              <a:rPr lang="en-US" sz="7200" dirty="0" spc="0" kern="0">
-                <a:solidFill>
-                  <a:srgbClr val="14161C"/>
-                </a:solidFill>
-                <a:latin typeface="Bricolage Grotesque ExtraBold" pitchFamily="34" charset="0"/>
-                <a:ea typeface="Bricolage Grotesque ExtraBold" pitchFamily="34" charset="-122"/>
-                <a:cs typeface="Bricolage Grotesque ExtraBold" pitchFamily="34" charset="-120"/>
-              </a:rPr>
               <a:t> hàng</a:t>
             </a:r>
             <a:r>
-              <a:rPr lang="en-US" sz="7200" dirty="0" spc="-59" kern="0">
+              <a:rPr lang="en-US" sz="7200" dirty="0" spc="-58" kern="0">
                 <a:solidFill>
                   <a:srgbClr val="14161C"/>
                 </a:solidFill>
@@ -4056,39 +4023,6 @@
                 <a:cs typeface="Be Vietnam Pro SemiBold" pitchFamily="34" charset="-120"/>
               </a:rPr>
               <a:t> đơn</a:t>
-            </a:r>
-            <a:r>
-              <a:rPr lang="en-US" sz="2250" dirty="0" spc="2" kern="0">
-                <a:solidFill>
-                  <a:srgbClr val="14161C"/>
-                </a:solidFill>
-                <a:latin typeface="Be Vietnam Pro SemiBold" pitchFamily="34" charset="0"/>
-                <a:ea typeface="Be Vietnam Pro SemiBold" pitchFamily="34" charset="-122"/>
-                <a:cs typeface="Be Vietnam Pro SemiBold" pitchFamily="34" charset="-120"/>
-              </a:rPr>
-              <a:t> của</a:t>
-            </a:r>
-            <a:r>
-              <a:rPr lang="en-US" sz="2250" dirty="0" spc="13" kern="0">
-                <a:solidFill>
-                  <a:srgbClr val="14161C"/>
-                </a:solidFill>
-                <a:latin typeface="Be Vietnam Pro SemiBold" pitchFamily="34" charset="0"/>
-                <a:ea typeface="Be Vietnam Pro SemiBold" pitchFamily="34" charset="-122"/>
-                <a:cs typeface="Be Vietnam Pro SemiBold" pitchFamily="34" charset="-120"/>
-              </a:rPr>
-              <a:t> cửa</a:t>
-            </a:r>
-            <a:r>
-              <a:rPr lang="en-US" sz="2250" dirty="0" spc="-2" kern="0">
-                <a:solidFill>
-                  <a:srgbClr val="14161C"/>
-                </a:solidFill>
-                <a:latin typeface="Be Vietnam Pro SemiBold" pitchFamily="34" charset="0"/>
-                <a:ea typeface="Be Vietnam Pro SemiBold" pitchFamily="34" charset="-122"/>
-                <a:cs typeface="Be Vietnam Pro SemiBold" pitchFamily="34" charset="-120"/>
-              </a:rPr>
-              <a:t> hàng</a:t>
             </a:r>
             <a:endParaRPr lang="en-US" sz="2250" dirty="0"/>
           </a:p>
@@ -4887,29 +4821,7 @@
                 <a:ea typeface="Be Vietnam Pro" pitchFamily="34" charset="-122"/>
                 <a:cs typeface="Be Vietnam Pro" pitchFamily="34" charset="-120"/>
               </a:rPr>
-              <a:t> dụ: nhóm</a:t>
-            </a:r>
-            <a:r>
-              <a:rPr lang="en-US" sz="2400" dirty="0" spc="4" kern="0">
-                <a:solidFill>
-                  <a:srgbClr val="9AA0B5"/>
-                </a:solidFill>
-                <a:latin typeface="Be Vietnam Pro" pitchFamily="34" charset="0"/>
-                <a:ea typeface="Be Vietnam Pro" pitchFamily="34" charset="-122"/>
-                <a:cs typeface="Be Vietnam Pro" pitchFamily="34" charset="-120"/>
-              </a:rPr>
-              <a:t> dữ</a:t>
-            </a:r>
-            <a:r>
-              <a:rPr lang="en-US" sz="2400" dirty="0" spc="-2" kern="0">
-                <a:solidFill>
-                  <a:srgbClr val="9AA0B5"/>
-                </a:solidFill>
-                <a:latin typeface="Be Vietnam Pro" pitchFamily="34" charset="0"/>
-                <a:ea typeface="Be Vietnam Pro" pitchFamily="34" charset="-122"/>
-                <a:cs typeface="Be Vietnam Pro" pitchFamily="34" charset="-120"/>
-              </a:rPr>
-              <a:t> liệu</a:t>
+              <a:t> dụ:</a:t>
             </a:r>
             <a:r>
               <a:rPr lang="en-US" sz="2400" dirty="0" spc="4" kern="0">
@@ -6748,6 +6660,61 @@
               <a:buNone/>
             </a:pPr>
             <a:r>
+              <a:rPr lang="en-US" sz="2550" dirty="0" spc="-34" kern="0">
+                <a:solidFill>
+                  <a:srgbClr val="14161C"/>
+                </a:solidFill>
+                <a:latin typeface="Be Vietnam Pro" pitchFamily="34" charset="0"/>
+                <a:ea typeface="Be Vietnam Pro" pitchFamily="34" charset="-122"/>
+                <a:cs typeface="Be Vietnam Pro" pitchFamily="34" charset="-120"/>
+              </a:rPr>
+              <a:t>Gateway</a:t>
+            </a:r>
+            <a:r>
+              <a:rPr lang="en-US" sz="2550" dirty="0" spc="1" kern="0">
+                <a:solidFill>
+                  <a:srgbClr val="14161C"/>
+                </a:solidFill>
+                <a:latin typeface="Be Vietnam Pro" pitchFamily="34" charset="0"/>
+                <a:ea typeface="Be Vietnam Pro" pitchFamily="34" charset="-122"/>
+                <a:cs typeface="Be Vietnam Pro" pitchFamily="34" charset="-120"/>
+              </a:rPr>
+              <a:t> không</a:t>
+            </a:r>
+            <a:r>
+              <a:rPr lang="en-US" sz="2550" dirty="0" spc="-8" kern="0">
+                <a:solidFill>
+                  <a:srgbClr val="14161C"/>
+                </a:solidFill>
+                <a:latin typeface="Be Vietnam Pro" pitchFamily="34" charset="0"/>
+                <a:ea typeface="Be Vietnam Pro" pitchFamily="34" charset="-122"/>
+                <a:cs typeface="Be Vietnam Pro" pitchFamily="34" charset="-120"/>
+              </a:rPr>
+              <a:t> thay</a:t>
+            </a:r>
+            <a:r>
+              <a:rPr lang="en-US" sz="2550" dirty="0" spc="-3" kern="0">
+                <a:solidFill>
+                  <a:srgbClr val="14161C"/>
+                </a:solidFill>
+                <a:latin typeface="Be Vietnam Pro" pitchFamily="34" charset="0"/>
+                <a:ea typeface="Be Vietnam Pro" pitchFamily="34" charset="-122"/>
+                <a:cs typeface="Be Vietnam Pro" pitchFamily="34" charset="-120"/>
+              </a:rPr>
+              <a:t> việc thiết</a:t>
+            </a:r>
+            <a:r>
+              <a:rPr lang="en-US" sz="2550" dirty="0" spc="-37" kern="0">
+                <a:solidFill>
+                  <a:srgbClr val="14161C"/>
+                </a:solidFill>
+                <a:latin typeface="Be Vietnam Pro" pitchFamily="34" charset="0"/>
+                <a:ea typeface="Be Vietnam Pro" pitchFamily="34" charset="-122"/>
+                <a:cs typeface="Be Vietnam Pro" pitchFamily="34" charset="-120"/>
+              </a:rPr>
+              <a:t> kế</a:t>
+            </a:r>
+            <a:r>
               <a:rPr lang="en-US" sz="2550" dirty="0" spc="-1" kern="0">
                 <a:solidFill>
                   <a:srgbClr val="14161C"/>
@@ -6756,10 +6723,10 @@
                 <a:ea typeface="Be Vietnam Pro" pitchFamily="34" charset="-122"/>
                 <a:cs typeface="Be Vietnam Pro" pitchFamily="34" charset="-120"/>
               </a:rPr>
-              <a:t>Hợp</a:t>
-            </a:r>
-            <a:r>
-              <a:rPr lang="en-US" sz="2550" dirty="0" spc="10" kern="0">
+              <a:t> hợp</a:t>
+            </a:r>
+            <a:r>
+              <a:rPr lang="en-US" sz="2550" dirty="0" spc="11" kern="0">
                 <a:solidFill>
                   <a:srgbClr val="14161C"/>
                 </a:solidFill>
@@ -6770,61 +6737,6 @@
               <a:t> đồng</a:t>
             </a:r>
             <a:r>
-              <a:rPr lang="en-US" sz="2550" dirty="0" spc="0" kern="0">
-                <a:solidFill>
-                  <a:srgbClr val="14161C"/>
-                </a:solidFill>
-                <a:latin typeface="Be Vietnam Pro" pitchFamily="34" charset="0"/>
-                <a:ea typeface="Be Vietnam Pro" pitchFamily="34" charset="-122"/>
-                <a:cs typeface="Be Vietnam Pro" pitchFamily="34" charset="-120"/>
-              </a:rPr>
-              <a:t> API</a:t>
-            </a:r>
-            <a:r>
-              <a:rPr lang="en-US" sz="2550" dirty="0" spc="-18" kern="0">
-                <a:solidFill>
-                  <a:srgbClr val="14161C"/>
-                </a:solidFill>
-                <a:latin typeface="Be Vietnam Pro" pitchFamily="34" charset="0"/>
-                <a:ea typeface="Be Vietnam Pro" pitchFamily="34" charset="-122"/>
-                <a:cs typeface="Be Vietnam Pro" pitchFamily="34" charset="-120"/>
-              </a:rPr>
-              <a:t> và</a:t>
-            </a:r>
-            <a:r>
-              <a:rPr lang="en-US" sz="2550" dirty="0" spc="-1" kern="0">
-                <a:solidFill>
-                  <a:srgbClr val="14161C"/>
-                </a:solidFill>
-                <a:latin typeface="Be Vietnam Pro" pitchFamily="34" charset="0"/>
-                <a:ea typeface="Be Vietnam Pro" pitchFamily="34" charset="-122"/>
-                <a:cs typeface="Be Vietnam Pro" pitchFamily="34" charset="-120"/>
-              </a:rPr>
-              <a:t> ý</a:t>
-            </a:r>
-            <a:r>
-              <a:rPr lang="en-US" sz="2550" dirty="0" spc="0" kern="0">
-                <a:solidFill>
-                  <a:srgbClr val="14161C"/>
-                </a:solidFill>
-                <a:latin typeface="Be Vietnam Pro" pitchFamily="34" charset="0"/>
-                <a:ea typeface="Be Vietnam Pro" pitchFamily="34" charset="-122"/>
-                <a:cs typeface="Be Vietnam Pro" pitchFamily="34" charset="-120"/>
-              </a:rPr>
-              <a:t> nghĩa</a:t>
-            </a:r>
-            <a:r>
-              <a:rPr lang="en-US" sz="2550" dirty="0" spc="-1" kern="0">
-                <a:solidFill>
-                  <a:srgbClr val="14161C"/>
-                </a:solidFill>
-                <a:latin typeface="Be Vietnam Pro" pitchFamily="34" charset="0"/>
-                <a:ea typeface="Be Vietnam Pro" pitchFamily="34" charset="-122"/>
-                <a:cs typeface="Be Vietnam Pro" pitchFamily="34" charset="-120"/>
-              </a:rPr>
-              <a:t> dữ</a:t>
-            </a:r>
-            <a:r>
               <a:rPr lang="en-US" sz="2550" dirty="0" spc="1" kern="0">
                 <a:solidFill>
                   <a:srgbClr val="14161C"/>
@@ -6833,139 +6745,7 @@
                 <a:ea typeface="Be Vietnam Pro" pitchFamily="34" charset="-122"/>
                 <a:cs typeface="Be Vietnam Pro" pitchFamily="34" charset="-120"/>
               </a:rPr>
-              <a:t> liệu</a:t>
-            </a:r>
-            <a:r>
-              <a:rPr lang="en-US" sz="2550" dirty="0" spc="-14" kern="0">
-                <a:solidFill>
-                  <a:srgbClr val="14161C"/>
-                </a:solidFill>
-                <a:latin typeface="Be Vietnam Pro" pitchFamily="34" charset="0"/>
-                <a:ea typeface="Be Vietnam Pro" pitchFamily="34" charset="-122"/>
-                <a:cs typeface="Be Vietnam Pro" pitchFamily="34" charset="-120"/>
-              </a:rPr>
-              <a:t> vẫn</a:t>
-            </a:r>
-            <a:r>
-              <a:rPr lang="en-US" sz="2550" dirty="0" spc="0" kern="0">
-                <a:solidFill>
-                  <a:srgbClr val="14161C"/>
-                </a:solidFill>
-                <a:latin typeface="Be Vietnam Pro" pitchFamily="34" charset="0"/>
-                <a:ea typeface="Be Vietnam Pro" pitchFamily="34" charset="-122"/>
-                <a:cs typeface="Be Vietnam Pro" pitchFamily="34" charset="-120"/>
-              </a:rPr>
-              <a:t> phải</a:t>
-            </a:r>
-            <a:r>
-              <a:rPr lang="en-US" sz="2550" dirty="0" spc="-3" kern="0">
-                <a:solidFill>
-                  <a:srgbClr val="14161C"/>
-                </a:solidFill>
-                <a:latin typeface="Be Vietnam Pro" pitchFamily="34" charset="0"/>
-                <a:ea typeface="Be Vietnam Pro" pitchFamily="34" charset="-122"/>
-                <a:cs typeface="Be Vietnam Pro" pitchFamily="34" charset="-120"/>
-              </a:rPr>
-              <a:t> thiết</a:t>
-            </a:r>
-            <a:r>
-              <a:rPr lang="en-US" sz="2550" dirty="0" spc="-27" kern="0">
-                <a:solidFill>
-                  <a:srgbClr val="14161C"/>
-                </a:solidFill>
-                <a:latin typeface="Be Vietnam Pro" pitchFamily="34" charset="0"/>
-                <a:ea typeface="Be Vietnam Pro" pitchFamily="34" charset="-122"/>
-                <a:cs typeface="Be Vietnam Pro" pitchFamily="34" charset="-120"/>
-              </a:rPr>
-              <a:t> kế.</a:t>
-            </a:r>
-            <a:r>
-              <a:rPr lang="en-US" sz="2550" dirty="0" spc="-30" kern="0">
-                <a:solidFill>
-                  <a:srgbClr val="14161C"/>
-                </a:solidFill>
-                <a:latin typeface="Be Vietnam Pro" pitchFamily="34" charset="0"/>
-                <a:ea typeface="Be Vietnam Pro" pitchFamily="34" charset="-122"/>
-                <a:cs typeface="Be Vietnam Pro" pitchFamily="34" charset="-120"/>
-              </a:rPr>
-              <a:t> Gateway</a:t>
-            </a:r>
-            <a:r>
-              <a:rPr lang="en-US" sz="2550" dirty="0" spc="1" kern="0">
-                <a:solidFill>
-                  <a:srgbClr val="14161C"/>
-                </a:solidFill>
-                <a:latin typeface="Be Vietnam Pro" pitchFamily="34" charset="0"/>
-                <a:ea typeface="Be Vietnam Pro" pitchFamily="34" charset="-122"/>
-                <a:cs typeface="Be Vietnam Pro" pitchFamily="34" charset="-120"/>
-              </a:rPr>
-              <a:t> không</a:t>
-            </a:r>
-            <a:r>
-              <a:rPr lang="en-US" sz="2550" dirty="0" spc="-1" kern="0">
-                <a:solidFill>
-                  <a:srgbClr val="14161C"/>
-                </a:solidFill>
-                <a:latin typeface="Be Vietnam Pro" pitchFamily="34" charset="0"/>
-                <a:ea typeface="Be Vietnam Pro" pitchFamily="34" charset="-122"/>
-                <a:cs typeface="Be Vietnam Pro" pitchFamily="34" charset="-120"/>
-              </a:rPr>
-              <a:t> tự</a:t>
-            </a:r>
-            <a:r>
-              <a:rPr lang="en-US" sz="2550" dirty="0" spc="1" kern="0">
-                <a:solidFill>
-                  <a:srgbClr val="14161C"/>
-                </a:solidFill>
-                <a:latin typeface="Be Vietnam Pro" pitchFamily="34" charset="0"/>
-                <a:ea typeface="Be Vietnam Pro" pitchFamily="34" charset="-122"/>
-                <a:cs typeface="Be Vietnam Pro" pitchFamily="34" charset="-120"/>
-              </a:rPr>
-              <a:t> làm</a:t>
-            </a:r>
-            <a:r>
-              <a:rPr lang="en-US" sz="2550" dirty="0" spc="0" kern="0">
-                <a:solidFill>
-                  <a:srgbClr val="14161C"/>
-                </a:solidFill>
-                <a:latin typeface="Be Vietnam Pro" pitchFamily="34" charset="0"/>
-                <a:ea typeface="Be Vietnam Pro" pitchFamily="34" charset="-122"/>
-                <a:cs typeface="Be Vietnam Pro" pitchFamily="34" charset="-120"/>
-              </a:rPr>
-              <a:t> mọi nền</a:t>
-            </a:r>
-            <a:r>
-              <a:rPr lang="en-US" sz="2550" dirty="0" spc="-9" kern="0">
-                <a:solidFill>
-                  <a:srgbClr val="14161C"/>
-                </a:solidFill>
-                <a:latin typeface="Be Vietnam Pro" pitchFamily="34" charset="0"/>
-                <a:ea typeface="Be Vietnam Pro" pitchFamily="34" charset="-122"/>
-                <a:cs typeface="Be Vietnam Pro" pitchFamily="34" charset="-120"/>
-              </a:rPr>
-              <a:t> tảng</a:t>
-            </a:r>
-            <a:r>
-              <a:rPr lang="en-US" sz="2550" dirty="0" spc="6" kern="0">
-                <a:solidFill>
-                  <a:srgbClr val="14161C"/>
-                </a:solidFill>
-                <a:latin typeface="Be Vietnam Pro" pitchFamily="34" charset="0"/>
-                <a:ea typeface="Be Vietnam Pro" pitchFamily="34" charset="-122"/>
-                <a:cs typeface="Be Vietnam Pro" pitchFamily="34" charset="-120"/>
-              </a:rPr>
-              <a:t> tương</a:t>
-            </a:r>
-            <a:r>
-              <a:rPr lang="en-US" sz="2550" dirty="0" spc="1" kern="0">
-                <a:solidFill>
-                  <a:srgbClr val="14161C"/>
-                </a:solidFill>
-                <a:latin typeface="Be Vietnam Pro" pitchFamily="34" charset="0"/>
-                <a:ea typeface="Be Vietnam Pro" pitchFamily="34" charset="-122"/>
-                <a:cs typeface="Be Vietnam Pro" pitchFamily="34" charset="-120"/>
-              </a:rPr>
-              <a:t> thích.</a:t>
+              <a:t> API.</a:t>
             </a:r>
             <a:endParaRPr lang="en-US" sz="2550" dirty="0"/>
           </a:p>
@@ -8111,6 +7891,50 @@
               <a:buNone/>
             </a:pPr>
             <a:r>
+              <a:rPr lang="en-US" sz="2850" dirty="0" spc="-3" kern="0">
+                <a:solidFill>
+                  <a:srgbClr val="F3EEE3"/>
+                </a:solidFill>
+                <a:latin typeface="Be Vietnam Pro" pitchFamily="34" charset="0"/>
+                <a:ea typeface="Be Vietnam Pro" pitchFamily="34" charset="-122"/>
+                <a:cs typeface="Be Vietnam Pro" pitchFamily="34" charset="-120"/>
+              </a:rPr>
+              <a:t>Không</a:t>
+            </a:r>
+            <a:r>
+              <a:rPr lang="en-US" sz="2850" dirty="0" spc="-2" kern="0">
+                <a:solidFill>
+                  <a:srgbClr val="F3EEE3"/>
+                </a:solidFill>
+                <a:latin typeface="Be Vietnam Pro" pitchFamily="34" charset="0"/>
+                <a:ea typeface="Be Vietnam Pro" pitchFamily="34" charset="-122"/>
+                <a:cs typeface="Be Vietnam Pro" pitchFamily="34" charset="-120"/>
+              </a:rPr>
+              <a:t> khẳng</a:t>
+            </a:r>
+            <a:r>
+              <a:rPr lang="en-US" sz="2850" dirty="0" spc="22" kern="0">
+                <a:solidFill>
+                  <a:srgbClr val="F3EEE3"/>
+                </a:solidFill>
+                <a:latin typeface="Be Vietnam Pro" pitchFamily="34" charset="0"/>
+                <a:ea typeface="Be Vietnam Pro" pitchFamily="34" charset="-122"/>
+                <a:cs typeface="Be Vietnam Pro" pitchFamily="34" charset="-120"/>
+              </a:rPr>
+              <a:t> định</a:t>
+            </a:r>
+            <a:r>
+              <a:rPr lang="en-US" sz="2850" dirty="0" spc="-8" kern="0">
+                <a:solidFill>
+                  <a:srgbClr val="F3EEE3"/>
+                </a:solidFill>
+                <a:latin typeface="Be Vietnam Pro" pitchFamily="34" charset="0"/>
+                <a:ea typeface="Be Vietnam Pro" pitchFamily="34" charset="-122"/>
+                <a:cs typeface="Be Vietnam Pro" pitchFamily="34" charset="-120"/>
+              </a:rPr>
+              <a:t> sản</a:t>
+            </a:r>
+            <a:r>
               <a:rPr lang="en-US" sz="2850" dirty="0" spc="-1" kern="0">
                 <a:solidFill>
                   <a:srgbClr val="F3EEE3"/>
@@ -8119,10 +7943,10 @@
                 <a:ea typeface="Be Vietnam Pro" pitchFamily="34" charset="-122"/>
                 <a:cs typeface="Be Vietnam Pro" pitchFamily="34" charset="-120"/>
               </a:rPr>
-              <a:t>Ví</a:t>
-            </a:r>
-            <a:r>
-              <a:rPr lang="en-US" sz="2850" dirty="0" spc="0" kern="0">
+              <a:t> phẩm</a:t>
+            </a:r>
+            <a:r>
+              <a:rPr lang="en-US" sz="2850" dirty="0" spc="1" kern="0">
                 <a:solidFill>
                   <a:srgbClr val="F3EEE3"/>
                 </a:solidFill>
@@ -8130,98 +7954,10 @@
                 <a:ea typeface="Be Vietnam Pro" pitchFamily="34" charset="-122"/>
                 <a:cs typeface="Be Vietnam Pro" pitchFamily="34" charset="-120"/>
               </a:rPr>
-              <a:t> dụ</a:t>
-            </a:r>
-            <a:r>
-              <a:rPr lang="en-US" sz="2850" dirty="0" spc="-3" kern="0">
-                <a:solidFill>
-                  <a:srgbClr val="F3EEE3"/>
-                </a:solidFill>
-                <a:latin typeface="Be Vietnam Pro" pitchFamily="34" charset="0"/>
-                <a:ea typeface="Be Vietnam Pro" pitchFamily="34" charset="-122"/>
-                <a:cs typeface="Be Vietnam Pro" pitchFamily="34" charset="-120"/>
-              </a:rPr>
-              <a:t> không</a:t>
-            </a:r>
-            <a:r>
-              <a:rPr lang="en-US" sz="2850" dirty="0" spc="-2" kern="0">
-                <a:solidFill>
-                  <a:srgbClr val="F3EEE3"/>
-                </a:solidFill>
-                <a:latin typeface="Be Vietnam Pro" pitchFamily="34" charset="0"/>
-                <a:ea typeface="Be Vietnam Pro" pitchFamily="34" charset="-122"/>
-                <a:cs typeface="Be Vietnam Pro" pitchFamily="34" charset="-120"/>
-              </a:rPr>
-              <a:t> khẳng</a:t>
-            </a:r>
-            <a:r>
-              <a:rPr lang="en-US" sz="2850" dirty="0" spc="23" kern="0">
-                <a:solidFill>
-                  <a:srgbClr val="F3EEE3"/>
-                </a:solidFill>
-                <a:latin typeface="Be Vietnam Pro" pitchFamily="34" charset="0"/>
-                <a:ea typeface="Be Vietnam Pro" pitchFamily="34" charset="-122"/>
-                <a:cs typeface="Be Vietnam Pro" pitchFamily="34" charset="-120"/>
-              </a:rPr>
-              <a:t> định</a:t>
-            </a:r>
-            <a:r>
-              <a:rPr lang="en-US" sz="2850" dirty="0" spc="-8" kern="0">
-                <a:solidFill>
-                  <a:srgbClr val="F3EEE3"/>
-                </a:solidFill>
-                <a:latin typeface="Be Vietnam Pro" pitchFamily="34" charset="0"/>
-                <a:ea typeface="Be Vietnam Pro" pitchFamily="34" charset="-122"/>
-                <a:cs typeface="Be Vietnam Pro" pitchFamily="34" charset="-120"/>
-              </a:rPr>
-              <a:t> sản</a:t>
+              <a:t> nào đủ</a:t>
             </a:r>
             <a:r>
               <a:rPr lang="en-US" sz="2850" dirty="0" spc="-1" kern="0">
-                <a:solidFill>
-                  <a:srgbClr val="F3EEE3"/>
-                </a:solidFill>
-                <a:latin typeface="Be Vietnam Pro" pitchFamily="34" charset="0"/>
-                <a:ea typeface="Be Vietnam Pro" pitchFamily="34" charset="-122"/>
-                <a:cs typeface="Be Vietnam Pro" pitchFamily="34" charset="-120"/>
-              </a:rPr>
-              <a:t> phẩm</a:t>
-            </a:r>
-            <a:r>
-              <a:rPr lang="en-US" sz="2850" dirty="0" spc="1" kern="0">
-                <a:solidFill>
-                  <a:srgbClr val="F3EEE3"/>
-                </a:solidFill>
-                <a:latin typeface="Be Vietnam Pro" pitchFamily="34" charset="0"/>
-                <a:ea typeface="Be Vietnam Pro" pitchFamily="34" charset="-122"/>
-                <a:cs typeface="Be Vietnam Pro" pitchFamily="34" charset="-120"/>
-              </a:rPr>
-              <a:t> nào</a:t>
-            </a:r>
-            <a:r>
-              <a:rPr lang="en-US" sz="2850" dirty="0" spc="-1" kern="0">
-                <a:solidFill>
-                  <a:srgbClr val="F3EEE3"/>
-                </a:solidFill>
-                <a:latin typeface="Be Vietnam Pro" pitchFamily="34" charset="0"/>
-                <a:ea typeface="Be Vietnam Pro" pitchFamily="34" charset="-122"/>
-                <a:cs typeface="Be Vietnam Pro" pitchFamily="34" charset="-120"/>
-              </a:rPr>
-              <a:t> có</a:t>
-            </a:r>
-            <a:r>
-              <a:rPr lang="en-US" sz="2850" dirty="0" spc="-8" kern="0">
-                <a:solidFill>
-                  <a:srgbClr val="F3EEE3"/>
-                </a:solidFill>
-                <a:latin typeface="Be Vietnam Pro" pitchFamily="34" charset="0"/>
-                <a:ea typeface="Be Vietnam Pro" pitchFamily="34" charset="-122"/>
-                <a:cs typeface="Be Vietnam Pro" pitchFamily="34" charset="-120"/>
-              </a:rPr>
-              <a:t> sẵn</a:t>
-            </a:r>
-            <a:r>
-              <a:rPr lang="en-US" sz="2850" dirty="0" spc="0" kern="0">
                 <a:solidFill>
                   <a:srgbClr val="F3EEE3"/>
                 </a:solidFill>
@@ -8799,7 +8535,7 @@
               <a:t> gateway,</a:t>
             </a:r>
             <a:r>
-              <a:rPr lang="en-US" sz="5400" dirty="0" spc="2" kern="0">
+              <a:rPr lang="en-US" sz="5400" dirty="0" spc="10" kern="0">
                 <a:solidFill>
                   <a:srgbClr val="14161C"/>
                 </a:solidFill>
@@ -8807,10 +8543,10 @@
                 <a:ea typeface="Bricolage Grotesque ExtraBold" pitchFamily="34" charset="-122"/>
                 <a:cs typeface="Bricolage Grotesque ExtraBold" pitchFamily="34" charset="-120"/>
               </a:rPr>
-              <a:t> nhưng</a:t>
-            </a:r>
-            <a:r>
-              <a:rPr lang="en-US" sz="5400" dirty="0" spc="12" kern="0">
+              <a:t> đối</a:t>
+            </a:r>
+            <a:r>
+              <a:rPr lang="en-US" sz="5400" dirty="0" spc="-7" kern="0">
                 <a:solidFill>
                   <a:srgbClr val="14161C"/>
                 </a:solidFill>
@@ -8818,10 +8554,10 @@
                 <a:ea typeface="Bricolage Grotesque ExtraBold" pitchFamily="34" charset="-122"/>
                 <a:cs typeface="Bricolage Grotesque ExtraBold" pitchFamily="34" charset="-120"/>
               </a:rPr>
-              <a:t> đối</a:t>
-            </a:r>
-            <a:r>
-              <a:rPr lang="en-US" sz="5400" dirty="0" spc="-7" kern="0">
+              <a:t> tác</a:t>
+            </a:r>
+            <a:r>
+              <a:rPr lang="en-US" sz="5400" dirty="0" spc="-39" kern="0">
                 <a:solidFill>
                   <a:srgbClr val="14161C"/>
                 </a:solidFill>
@@ -8829,10 +8565,10 @@
                 <a:ea typeface="Bricolage Grotesque ExtraBold" pitchFamily="34" charset="-122"/>
                 <a:cs typeface="Bricolage Grotesque ExtraBold" pitchFamily="34" charset="-120"/>
               </a:rPr>
-              <a:t> tác</a:t>
-            </a:r>
-            <a:r>
-              <a:rPr lang="en-US" sz="5400" dirty="0" spc="-39" kern="0">
+              <a:t> chưa</a:t>
+            </a:r>
+            <a:r>
+              <a:rPr lang="en-US" sz="5400" dirty="0" spc="-1" kern="0">
                 <a:solidFill>
                   <a:srgbClr val="14161C"/>
                 </a:solidFill>
@@ -8840,10 +8576,10 @@
                 <a:ea typeface="Bricolage Grotesque ExtraBold" pitchFamily="34" charset="-122"/>
                 <a:cs typeface="Bricolage Grotesque ExtraBold" pitchFamily="34" charset="-120"/>
               </a:rPr>
-              <a:t> chưa</a:t>
-            </a:r>
-            <a:r>
-              <a:rPr lang="en-US" sz="5400" dirty="0" spc="-1" kern="0">
+              <a:t> biết</a:t>
+            </a:r>
+            <a:r>
+              <a:rPr lang="en-US" sz="5400" dirty="0" spc="-2" kern="0">
                 <a:solidFill>
                   <a:srgbClr val="14161C"/>
                 </a:solidFill>
@@ -8851,10 +8587,10 @@
                 <a:ea typeface="Bricolage Grotesque ExtraBold" pitchFamily="34" charset="-122"/>
                 <a:cs typeface="Bricolage Grotesque ExtraBold" pitchFamily="34" charset="-120"/>
               </a:rPr>
-              <a:t> biết</a:t>
-            </a:r>
-            <a:r>
-              <a:rPr lang="en-US" sz="5400" dirty="0" spc="-2" kern="0">
+              <a:t> API</a:t>
+            </a:r>
+            <a:r>
+              <a:rPr lang="en-US" sz="5400" dirty="0" spc="-12" kern="0">
                 <a:solidFill>
                   <a:srgbClr val="14161C"/>
                 </a:solidFill>
@@ -8862,10 +8598,10 @@
                 <a:ea typeface="Bricolage Grotesque ExtraBold" pitchFamily="34" charset="-122"/>
                 <a:cs typeface="Bricolage Grotesque ExtraBold" pitchFamily="34" charset="-120"/>
               </a:rPr>
-              <a:t> API nào</a:t>
-            </a:r>
-            <a:r>
-              <a:rPr lang="en-US" sz="5400" dirty="0" spc="-23" kern="0">
+              <a:t> nào.</a:t>
+            </a:r>
+            <a:r>
+              <a:rPr lang="en-US" sz="5400" dirty="0" spc="0" kern="0">
                 <a:solidFill>
                   <a:srgbClr val="14161C"/>
                 </a:solidFill>
@@ -8873,32 +8609,10 @@
                 <a:ea typeface="Bricolage Grotesque ExtraBold" pitchFamily="34" charset="-122"/>
                 <a:cs typeface="Bricolage Grotesque ExtraBold" pitchFamily="34" charset="-120"/>
               </a:rPr>
-              <a:t> tồn</a:t>
-            </a:r>
-            <a:r>
-              <a:rPr lang="en-US" sz="5400" dirty="0" spc="-7" kern="0">
-                <a:solidFill>
-                  <a:srgbClr val="14161C"/>
-                </a:solidFill>
-                <a:latin typeface="Bricolage Grotesque ExtraBold" pitchFamily="34" charset="0"/>
-                <a:ea typeface="Bricolage Grotesque ExtraBold" pitchFamily="34" charset="-122"/>
-                <a:cs typeface="Bricolage Grotesque ExtraBold" pitchFamily="34" charset="-120"/>
-              </a:rPr>
-              <a:t> tại.</a:t>
-            </a:r>
-            <a:r>
-              <a:rPr lang="en-US" sz="5400" dirty="0" spc="1" kern="0">
-                <a:solidFill>
-                  <a:srgbClr val="14161C"/>
-                </a:solidFill>
-                <a:latin typeface="Bricolage Grotesque ExtraBold" pitchFamily="34" charset="0"/>
-                <a:ea typeface="Bricolage Grotesque ExtraBold" pitchFamily="34" charset="-122"/>
-                <a:cs typeface="Bricolage Grotesque ExtraBold" pitchFamily="34" charset="-120"/>
-              </a:rPr>
               <a:t> Thiếu</a:t>
             </a:r>
             <a:r>
-              <a:rPr lang="en-US" sz="5400" dirty="0" spc="-17" kern="0">
+              <a:rPr lang="en-US" sz="5400" dirty="0" spc="-16" kern="0">
                 <a:solidFill>
                   <a:srgbClr val="14161C"/>
                 </a:solidFill>
@@ -10987,7 +10701,7 @@
               <a:t> không</a:t>
             </a:r>
             <a:r>
-              <a:rPr lang="en-US" sz="1950" dirty="0" spc="-15" kern="0">
+              <a:rPr lang="en-US" sz="1950" dirty="0" spc="17" kern="0">
                 <a:solidFill>
                   <a:srgbClr val="6B6A66"/>
                 </a:solidFill>
@@ -10995,18 +10709,7 @@
                 <a:ea typeface="Be Vietnam Pro" pitchFamily="34" charset="-122"/>
                 <a:cs typeface="Be Vietnam Pro" pitchFamily="34" charset="-120"/>
               </a:rPr>
-              <a:t> tuyệt</a:t>
-            </a:r>
-            <a:r>
-              <a:rPr lang="en-US" sz="1950" dirty="0" spc="10" kern="0">
-                <a:solidFill>
-                  <a:srgbClr val="6B6A66"/>
-                </a:solidFill>
-                <a:latin typeface="Be Vietnam Pro" pitchFamily="34" charset="0"/>
-                <a:ea typeface="Be Vietnam Pro" pitchFamily="34" charset="-122"/>
-                <a:cs typeface="Be Vietnam Pro" pitchFamily="34" charset="-120"/>
-              </a:rPr>
-              <a:t> đối</a:t>
+              <a:t> cứng</a:t>
             </a:r>
             <a:endParaRPr lang="en-US" sz="1950" dirty="0"/>
           </a:p>

--- a/system-design-101/vi/lessons/sd-01-023/slides/sd-01-023.pptx
+++ b/system-design-101/vi/lessons/sd-01-023/slides/sd-01-023.pptx
@@ -8494,7 +8494,7 @@
         <p:spPr>
           <a:xfrm>
             <a:off x="914400" y="1390650"/>
-            <a:ext cx="16459200" cy="1905000"/>
+            <a:ext cx="16459200" cy="2047875"/>
           </a:xfrm>
           <a:prstGeom prst="rect">
             <a:avLst/>
@@ -8503,17 +8503,17 @@
           <a:ln/>
         </p:spPr>
         <p:txBody>
-          <a:bodyPr wrap="square" lIns="0" tIns="34290" rIns="0" bIns="-34290" rtlCol="0" anchor="t"/>
+          <a:bodyPr wrap="square" lIns="0" tIns="43815" rIns="0" bIns="-43815" rtlCol="0" anchor="t"/>
           <a:lstStyle/>
           <a:p>
             <a:pPr algn="l" indent="0" marL="0">
               <a:lnSpc>
-                <a:spcPts val="5940"/>
+                <a:spcPts val="7590"/>
               </a:lnSpc>
               <a:buNone/>
             </a:pPr>
             <a:r>
-              <a:rPr lang="en-US" sz="5400" dirty="0" spc="-3" kern="0">
+              <a:rPr lang="en-US" sz="6900" dirty="0" spc="2" kern="0">
                 <a:solidFill>
                   <a:srgbClr val="14161C"/>
                 </a:solidFill>
@@ -8524,7 +8524,7 @@
               <a:t>Có</a:t>
             </a:r>
             <a:r>
-              <a:rPr lang="en-US" sz="5400" dirty="0" spc="-46" kern="0">
+              <a:rPr lang="en-US" sz="6900" dirty="0" spc="-59" kern="0">
                 <a:solidFill>
                   <a:srgbClr val="14161C"/>
                 </a:solidFill>
@@ -8535,7 +8535,7 @@
               <a:t> gateway,</a:t>
             </a:r>
             <a:r>
-              <a:rPr lang="en-US" sz="5400" dirty="0" spc="10" kern="0">
+              <a:rPr lang="en-US" sz="6900" dirty="0" spc="12" kern="0">
                 <a:solidFill>
                   <a:srgbClr val="14161C"/>
                 </a:solidFill>
@@ -8546,7 +8546,7 @@
               <a:t> đối</a:t>
             </a:r>
             <a:r>
-              <a:rPr lang="en-US" sz="5400" dirty="0" spc="-7" kern="0">
+              <a:rPr lang="en-US" sz="6900" dirty="0" spc="-7" kern="0">
                 <a:solidFill>
                   <a:srgbClr val="14161C"/>
                 </a:solidFill>
@@ -8557,7 +8557,7 @@
               <a:t> tác</a:t>
             </a:r>
             <a:r>
-              <a:rPr lang="en-US" sz="5400" dirty="0" spc="-39" kern="0">
+              <a:rPr lang="en-US" sz="6900" dirty="0" spc="-47" kern="0">
                 <a:solidFill>
                   <a:srgbClr val="14161C"/>
                 </a:solidFill>
@@ -8568,7 +8568,7 @@
               <a:t> chưa</a:t>
             </a:r>
             <a:r>
-              <a:rPr lang="en-US" sz="5400" dirty="0" spc="-1" kern="0">
+              <a:rPr lang="en-US" sz="6900" dirty="0" spc="1" kern="0">
                 <a:solidFill>
                   <a:srgbClr val="14161C"/>
                 </a:solidFill>
@@ -8579,7 +8579,7 @@
               <a:t> biết</a:t>
             </a:r>
             <a:r>
-              <a:rPr lang="en-US" sz="5400" dirty="0" spc="-2" kern="0">
+              <a:rPr lang="en-US" sz="6900" dirty="0" spc="2" kern="0">
                 <a:solidFill>
                   <a:srgbClr val="14161C"/>
                 </a:solidFill>
@@ -8590,7 +8590,7 @@
               <a:t> API</a:t>
             </a:r>
             <a:r>
-              <a:rPr lang="en-US" sz="5400" dirty="0" spc="-12" kern="0">
+              <a:rPr lang="en-US" sz="6900" dirty="0" spc="-14" kern="0">
                 <a:solidFill>
                   <a:srgbClr val="14161C"/>
                 </a:solidFill>
@@ -8601,7 +8601,7 @@
               <a:t> nào.</a:t>
             </a:r>
             <a:r>
-              <a:rPr lang="en-US" sz="5400" dirty="0" spc="0" kern="0">
+              <a:rPr lang="en-US" sz="6900" dirty="0" spc="6" kern="0">
                 <a:solidFill>
                   <a:srgbClr val="14161C"/>
                 </a:solidFill>
@@ -8612,7 +8612,7 @@
               <a:t> Thiếu</a:t>
             </a:r>
             <a:r>
-              <a:rPr lang="en-US" sz="5400" dirty="0" spc="-16" kern="0">
+              <a:rPr lang="en-US" sz="6900" dirty="0" spc="-22" kern="0">
                 <a:solidFill>
                   <a:srgbClr val="14161C"/>
                 </a:solidFill>
@@ -8622,7 +8622,7 @@
               </a:rPr>
               <a:t> gì?</a:t>
             </a:r>
-            <a:endParaRPr lang="en-US" sz="5400" dirty="0"/>
+            <a:endParaRPr lang="en-US" sz="6900" dirty="0"/>
           </a:p>
         </p:txBody>
       </p:sp>
@@ -8634,12 +8634,12 @@
         </p:nvSpPr>
         <p:spPr>
           <a:xfrm>
-            <a:off x="914400" y="3619500"/>
-            <a:ext cx="8096250" cy="5143500"/>
+            <a:off x="914400" y="3810000"/>
+            <a:ext cx="8096250" cy="4953000"/>
           </a:xfrm>
           <a:prstGeom prst="roundRect">
             <a:avLst>
-              <a:gd name="adj" fmla="val 5926"/>
+              <a:gd name="adj" fmla="val 6154"/>
             </a:avLst>
           </a:prstGeom>
           <a:solidFill>
@@ -8656,7 +8656,7 @@
         </p:nvSpPr>
         <p:spPr>
           <a:xfrm>
-            <a:off x="1333500" y="3962400"/>
+            <a:off x="1333500" y="4152900"/>
             <a:ext cx="7334250" cy="457200"/>
           </a:xfrm>
           <a:prstGeom prst="rect">
@@ -8706,7 +8706,7 @@
         </p:nvSpPr>
         <p:spPr>
           <a:xfrm>
-            <a:off x="1333500" y="4476750"/>
+            <a:off x="1333500" y="4667250"/>
             <a:ext cx="7334250" cy="2857500"/>
           </a:xfrm>
           <a:prstGeom prst="rect">
@@ -8885,12 +8885,12 @@
         </p:nvSpPr>
         <p:spPr>
           <a:xfrm>
-            <a:off x="9277350" y="3619500"/>
-            <a:ext cx="8096250" cy="5143500"/>
+            <a:off x="9277350" y="3810000"/>
+            <a:ext cx="8096250" cy="4953000"/>
           </a:xfrm>
           <a:prstGeom prst="roundRect">
             <a:avLst>
-              <a:gd name="adj" fmla="val 5926"/>
+              <a:gd name="adj" fmla="val 6154"/>
             </a:avLst>
           </a:prstGeom>
           <a:solidFill>
@@ -8912,7 +8912,7 @@
         </p:nvSpPr>
         <p:spPr>
           <a:xfrm>
-            <a:off x="9696450" y="3962400"/>
+            <a:off x="9696450" y="4152900"/>
             <a:ext cx="7334250" cy="457200"/>
           </a:xfrm>
           <a:prstGeom prst="rect">
@@ -9006,7 +9006,7 @@
         </p:nvSpPr>
         <p:spPr>
           <a:xfrm>
-            <a:off x="9696450" y="4476750"/>
+            <a:off x="9696450" y="4667250"/>
             <a:ext cx="7334250" cy="2857500"/>
           </a:xfrm>
           <a:prstGeom prst="rect">
